--- a/labs/140-linux-password-recovery-and-locking-out-root/assets/Linux Password Recovery and Root Lockout SUBMISSION TEMPLATE.pptx
+++ b/labs/140-linux-password-recovery-and-locking-out-root/assets/Linux Password Recovery and Root Lockout SUBMISSION TEMPLATE.pptx
@@ -6671,7 +6671,8 @@
           <a:lstStyle/>
           <a:p>
             <a:r>
-              <a:t>Screenshot 1</a:t>
+              <a:rPr sz="1800"/>
+              <a:t>Screenshot 1 System booted into single-user mode with both highlighted portions visible.</a:t>
             </a:r>
           </a:p>
         </p:txBody>
@@ -6698,11 +6699,7 @@
             <a:normAutofit/>
           </a:bodyPr>
           <a:lstStyle/>
-          <a:p>
-            <a:r>
-              <a:t>System booted into single-user mode with both highlighted portions visible.</a:t>
-            </a:r>
-          </a:p>
+          <a:p/>
         </p:txBody>
       </p:sp>
     </p:spTree>
@@ -6754,7 +6751,8 @@
           <a:lstStyle/>
           <a:p>
             <a:r>
-              <a:t>Screenshot 2</a:t>
+              <a:rPr sz="1800"/>
+              <a:t>Screenshot 2 passwd reporting success and /etc/passwd showing the regular user created during Debian install.</a:t>
             </a:r>
           </a:p>
         </p:txBody>
@@ -6781,11 +6779,7 @@
             <a:normAutofit/>
           </a:bodyPr>
           <a:lstStyle/>
-          <a:p>
-            <a:r>
-              <a:t>passwd reporting success and /etc/passwd showing the regular user created during Debian install.</a:t>
-            </a:r>
-          </a:p>
+          <a:p/>
         </p:txBody>
       </p:sp>
     </p:spTree>
@@ -6837,7 +6831,8 @@
           <a:lstStyle/>
           <a:p>
             <a:r>
-              <a:t>Screenshot 3</a:t>
+              <a:rPr sz="2200"/>
+              <a:t>Screenshot 3 Proof that your user now has sudo access.</a:t>
             </a:r>
           </a:p>
         </p:txBody>
@@ -6864,11 +6859,7 @@
             <a:normAutofit/>
           </a:bodyPr>
           <a:lstStyle/>
-          <a:p>
-            <a:r>
-              <a:t>Proof that your user now has sudo access.</a:t>
-            </a:r>
-          </a:p>
+          <a:p/>
         </p:txBody>
       </p:sp>
     </p:spTree>
@@ -6920,7 +6911,8 @@
           <a:lstStyle/>
           <a:p>
             <a:r>
-              <a:t>Screenshot 4</a:t>
+              <a:rPr sz="2000"/>
+              <a:t>Screenshot 4 Proof that root was disabled, including the ! in /etc/shadow.</a:t>
             </a:r>
           </a:p>
         </p:txBody>
@@ -6947,11 +6939,7 @@
             <a:normAutofit/>
           </a:bodyPr>
           <a:lstStyle/>
-          <a:p>
-            <a:r>
-              <a:t>Proof that root was disabled, including the ! in /etc/shadow.</a:t>
-            </a:r>
-          </a:p>
+          <a:p/>
         </p:txBody>
       </p:sp>
     </p:spTree>
